--- a/3D_군생활관_프로젝트_설명.pptx
+++ b/3D_군생활관_프로젝트_설명.pptx
@@ -18,6 +18,8 @@
     <p:sldId id="266" r:id="rId17"/>
     <p:sldId id="267" r:id="rId18"/>
     <p:sldId id="268" r:id="rId19"/>
+    <p:sldId id="269" r:id="rId20"/>
+    <p:sldId id="270" r:id="rId21"/>
   </p:sldIdLst>
   <p:sldSz cx="9144000" cy="6858000" type="screen4x3"/>
   <p:notesSz cx="6858000" cy="9144000"/>
@@ -3183,7 +3185,7 @@
           <a:lstStyle/>
           <a:p>
             <a:r>
-              <a:t>애니메이션 시스템</a:t>
+              <a:t>아바타 &amp; 컨트롤 시스템</a:t>
             </a:r>
           </a:p>
         </p:txBody>
@@ -3204,71 +3206,97 @@
           <a:lstStyle/>
           <a:p>
             <a:r>
-              <a:t>실시간 애니메이션 (총 8개)</a:t>
-            </a:r>
-          </a:p>
-          <a:p>
-            <a:pPr lvl="1">
-              <a:defRPr sz="1600"/>
-            </a:pPr>
-            <a:r>
-              <a:t>천장 조명 깜빡임: 빠른 플리커 + 느린 펄스 + 랜덤 노이즈</a:t>
-            </a:r>
-          </a:p>
-          <a:p>
-            <a:pPr lvl="1">
-              <a:defRPr sz="1600"/>
-            </a:pPr>
-            <a:r>
-              <a:t>TV 화면 펄싱: 청색 발광 효과 애니메이션</a:t>
-            </a:r>
-          </a:p>
-          <a:p>
-            <a:pPr lvl="1">
-              <a:defRPr sz="1600"/>
-            </a:pPr>
-            <a:r>
-              <a:t>창문 색상 사이클: 주간 → 저녁 → 야간 색상 변화</a:t>
-            </a:r>
-          </a:p>
-          <a:p>
-            <a:pPr lvl="1">
-              <a:defRPr sz="1600"/>
-            </a:pPr>
-            <a:r>
-              <a:t>침대 시트 바람: UV 오프셋 애니메이션</a:t>
-            </a:r>
-          </a:p>
-          <a:p>
-            <a:pPr lvl="1">
-              <a:defRPr sz="1600"/>
-            </a:pPr>
-            <a:r>
-              <a:t>천장 선풍기 회전: 연속 회전 애니메이션</a:t>
-            </a:r>
-          </a:p>
-          <a:p>
-            <a:pPr lvl="1">
-              <a:defRPr sz="1600"/>
-            </a:pPr>
-            <a:r>
-              <a:t>문 개폐: 근접 시 부드러운 회전 (&lt; 3 units)</a:t>
-            </a:r>
-          </a:p>
-          <a:p>
-            <a:pPr lvl="1">
-              <a:defRPr sz="1600"/>
-            </a:pPr>
-            <a:r>
-              <a:t>먼지 파티클: 브라운 운동 시뮬레이션</a:t>
-            </a:r>
-          </a:p>
-          <a:p>
-            <a:pPr lvl="1">
-              <a:defRPr sz="1600"/>
-            </a:pPr>
-            <a:r>
-              <a:t>라디에이터 발열: 열 효과 애니메이션</a:t>
+              <a:t>Avatar (objects/Avatar.js)</a:t>
+            </a:r>
+          </a:p>
+          <a:p>
+            <a:pPr lvl="1"/>
+            <a:r>
+              <a:t>머리, 몸통, 팔, 다리로 구성된 심플한 캐릭터</a:t>
+            </a:r>
+          </a:p>
+          <a:p>
+            <a:pPr lvl="1"/>
+            <a:r>
+              <a:t>군복 색상 적용 (밀리터리 그린: #4A5D23)</a:t>
+            </a:r>
+          </a:p>
+          <a:p>
+            <a:pPr lvl="1"/>
+            <a:r>
+              <a:t>그림자 캐스팅 지원</a:t>
+            </a:r>
+          </a:p>
+          <a:p/>
+          <a:p>
+            <a:r>
+              <a:t>AvatarController (controls/AvatarController.js)</a:t>
+            </a:r>
+          </a:p>
+          <a:p>
+            <a:pPr lvl="1"/>
+            <a:r>
+              <a:t>WASD 키보드 입력으로 이동</a:t>
+            </a:r>
+          </a:p>
+          <a:p>
+            <a:pPr lvl="1"/>
+            <a:r>
+              <a:t>카메라 상대 방향 이동</a:t>
+            </a:r>
+          </a:p>
+          <a:p>
+            <a:pPr lvl="1"/>
+            <a:r>
+              <a:t>방 경계 충돌 감지 (±9, ±7 units)</a:t>
+            </a:r>
+          </a:p>
+          <a:p/>
+          <a:p>
+            <a:r>
+              <a:t>CameraController (controls/CameraController.js)</a:t>
+            </a:r>
+          </a:p>
+          <a:p>
+            <a:pPr lvl="1"/>
+            <a:r>
+              <a:t>마우스 드래그로 카메라 회전 (요/피치)</a:t>
+            </a:r>
+          </a:p>
+          <a:p>
+            <a:pPr lvl="1"/>
+            <a:r>
+              <a:t>마우스 휠로 줌 (3-15 units)</a:t>
+            </a:r>
+          </a:p>
+          <a:p>
+            <a:pPr lvl="1"/>
+            <a:r>
+              <a:t>3인칭 뷰로 아바타 추적</a:t>
+            </a:r>
+          </a:p>
+          <a:p/>
+          <a:p>
+            <a:r>
+              <a:t>InteractionController (controls/InteractionController.js)</a:t>
+            </a:r>
+          </a:p>
+          <a:p>
+            <a:pPr lvl="1"/>
+            <a:r>
+              <a:t>마우스 클릭으로 객체와 상호작용</a:t>
+            </a:r>
+          </a:p>
+          <a:p>
+            <a:pPr lvl="1"/>
+            <a:r>
+              <a:t>Raycasting으로 클릭 가능한 객체 감지</a:t>
+            </a:r>
+          </a:p>
+          <a:p>
+            <a:pPr lvl="1"/>
+            <a:r>
+              <a:t>전등 스위치 토글 기능</a:t>
             </a:r>
           </a:p>
         </p:txBody>
@@ -3307,7 +3335,7 @@
           <a:lstStyle/>
           <a:p>
             <a:r>
-              <a:t>주요 기능 요약</a:t>
+              <a:t>렌더링 기술</a:t>
             </a:r>
           </a:p>
         </p:txBody>
@@ -3328,79 +3356,73 @@
           <a:lstStyle/>
           <a:p>
             <a:r>
-              <a:t>인터랙션</a:t>
-            </a:r>
-          </a:p>
-          <a:p>
-            <a:pPr lvl="1"/>
-            <a:r>
-              <a:t>WASD로 아바타 이동 (카메라 상대 방향)</a:t>
-            </a:r>
-          </a:p>
-          <a:p>
-            <a:pPr lvl="1"/>
-            <a:r>
-              <a:t>마우스 드래그/휠로 카메라 조작</a:t>
-            </a:r>
-          </a:p>
-          <a:p>
-            <a:pPr lvl="1"/>
-            <a:r>
-              <a:t>자동 문 개폐 (근접 감지)</a:t>
+              <a:t>PBR (Physically Based Rendering)</a:t>
+            </a:r>
+          </a:p>
+          <a:p>
+            <a:pPr lvl="1"/>
+            <a:r>
+              <a:t>MeshStandardMaterial 사용</a:t>
+            </a:r>
+          </a:p>
+          <a:p>
+            <a:pPr lvl="1"/>
+            <a:r>
+              <a:t>Diffuse/Albedo 맵 - 기본 색상</a:t>
+            </a:r>
+          </a:p>
+          <a:p>
+            <a:pPr lvl="1"/>
+            <a:r>
+              <a:t>Normal 맵 - 표면 디테일</a:t>
+            </a:r>
+          </a:p>
+          <a:p>
+            <a:pPr lvl="1"/>
+            <a:r>
+              <a:t>Roughness 맵 - 거칠기</a:t>
+            </a:r>
+          </a:p>
+          <a:p>
+            <a:pPr lvl="1"/>
+            <a:r>
+              <a:t>Metalness 파라미터</a:t>
             </a:r>
           </a:p>
           <a:p/>
           <a:p>
             <a:r>
-              <a:t>시각 효과</a:t>
-            </a:r>
-          </a:p>
-          <a:p>
-            <a:pPr lvl="1"/>
-            <a:r>
-              <a:t>PBR 재질과 텍스처 맵핑</a:t>
-            </a:r>
-          </a:p>
-          <a:p>
-            <a:pPr lvl="1"/>
-            <a:r>
-              <a:t>9개 광원 (포인트, 스팟, 디렉셔널)</a:t>
-            </a:r>
-          </a:p>
-          <a:p>
-            <a:pPr lvl="1"/>
-            <a:r>
-              <a:t>8개 실시간 애니메이션</a:t>
-            </a:r>
-          </a:p>
-          <a:p>
-            <a:pPr lvl="1"/>
-            <a:r>
-              <a:t>고품질 그림자 (4K 해상도)</a:t>
-            </a:r>
-          </a:p>
-          <a:p/>
-          <a:p>
-            <a:r>
-              <a:t>자산 관리</a:t>
-            </a:r>
-          </a:p>
-          <a:p>
-            <a:pPr lvl="1"/>
-            <a:r>
-              <a:t>GLB 3D 모델 로딩 (5개)</a:t>
-            </a:r>
-          </a:p>
-          <a:p>
-            <a:pPr lvl="1"/>
-            <a:r>
-              <a:t>PBR 텍스처 세트 (대리석, 리넨)</a:t>
-            </a:r>
-          </a:p>
-          <a:p>
-            <a:pPr lvl="1"/>
-            <a:r>
-              <a:t>에러 핸들링 및 타임아웃 처리</a:t>
+              <a:t>고급 렌더링 설정</a:t>
+            </a:r>
+          </a:p>
+          <a:p>
+            <a:pPr lvl="1"/>
+            <a:r>
+              <a:t>ACES Filmic Tone Mapping - 영화 같은 색감</a:t>
+            </a:r>
+          </a:p>
+          <a:p>
+            <a:pPr lvl="1"/>
+            <a:r>
+              <a:t>sRGB 색공간 인코딩</a:t>
+            </a:r>
+          </a:p>
+          <a:p>
+            <a:pPr lvl="1"/>
+            <a:r>
+              <a:t>PCF Soft Shadows - 부드러운 그림자</a:t>
+            </a:r>
+          </a:p>
+          <a:p>
+            <a:pPr lvl="1"/>
+            <a:r>
+              <a:t>4096x4096 그림자 맵 해상도</a:t>
+            </a:r>
+          </a:p>
+          <a:p>
+            <a:pPr lvl="1"/>
+            <a:r>
+              <a:t>안티앨리어싱 및 고해상도 픽셀 비율 지원</a:t>
             </a:r>
           </a:p>
         </p:txBody>
@@ -3439,7 +3461,7 @@
           <a:lstStyle/>
           <a:p>
             <a:r>
-              <a:t>프로젝트 통계</a:t>
+              <a:t>애니메이션 시스템</a:t>
             </a:r>
           </a:p>
         </p:txBody>
@@ -3460,79 +3482,71 @@
           <a:lstStyle/>
           <a:p>
             <a:r>
-              <a:t>코드 규모</a:t>
-            </a:r>
-          </a:p>
-          <a:p>
-            <a:pPr lvl="1"/>
-            <a:r>
-              <a:t>총 17개 JavaScript 파일</a:t>
-            </a:r>
-          </a:p>
-          <a:p>
-            <a:pPr lvl="1"/>
-            <a:r>
-              <a:t>약 1,687줄의 코드</a:t>
-            </a:r>
-          </a:p>
-          <a:p>
-            <a:pPr lvl="1"/>
-            <a:r>
-              <a:t>프로젝트 크기: ~80MB</a:t>
-            </a:r>
-          </a:p>
-          <a:p/>
-          <a:p>
-            <a:r>
-              <a:t>3D 자산</a:t>
-            </a:r>
-          </a:p>
-          <a:p>
-            <a:pPr lvl="1"/>
-            <a:r>
-              <a:t>5개 GLB 3D 모델 (문, 창문, TV, 선풍기, 라디에이터)</a:t>
-            </a:r>
-          </a:p>
-          <a:p>
-            <a:pPr lvl="1"/>
-            <a:r>
-              <a:t>2개 PBR 텍스처 세트 (대리석, 리넨)</a:t>
-            </a:r>
-          </a:p>
-          <a:p>
-            <a:pPr lvl="1"/>
-            <a:r>
-              <a:t>총 23개 씬 오브젝트</a:t>
-            </a:r>
-          </a:p>
-          <a:p/>
-          <a:p>
-            <a:r>
-              <a:t>모듈 구성</a:t>
-            </a:r>
-          </a:p>
-          <a:p>
-            <a:pPr lvl="1"/>
-            <a:r>
-              <a:t>Scene: 2개 (SceneManager, LightManager)</a:t>
-            </a:r>
-          </a:p>
-          <a:p>
-            <a:pPr lvl="1"/>
-            <a:r>
-              <a:t>Controls: 2개 (Avatar, Camera)</a:t>
-            </a:r>
-          </a:p>
-          <a:p>
-            <a:pPr lvl="1"/>
-            <a:r>
-              <a:t>Objects: 9개 (Barracks, Avatar, 가구들)</a:t>
-            </a:r>
-          </a:p>
-          <a:p>
-            <a:pPr lvl="1"/>
-            <a:r>
-              <a:t>Loaders: 2개 (Texture, Model)</a:t>
+              <a:t>실시간 애니메이션 (총 8개)</a:t>
+            </a:r>
+          </a:p>
+          <a:p>
+            <a:pPr lvl="1">
+              <a:defRPr sz="1600"/>
+            </a:pPr>
+            <a:r>
+              <a:t>천장 조명 깜빡임: 빠른 플리커 + 느린 펄스 + 랜덤 노이즈</a:t>
+            </a:r>
+          </a:p>
+          <a:p>
+            <a:pPr lvl="1">
+              <a:defRPr sz="1600"/>
+            </a:pPr>
+            <a:r>
+              <a:t>TV 화면 펄싱: 청색 발광 효과 애니메이션</a:t>
+            </a:r>
+          </a:p>
+          <a:p>
+            <a:pPr lvl="1">
+              <a:defRPr sz="1600"/>
+            </a:pPr>
+            <a:r>
+              <a:t>창문 색상 사이클: 주간 → 저녁 → 야간 색상 변화</a:t>
+            </a:r>
+          </a:p>
+          <a:p>
+            <a:pPr lvl="1">
+              <a:defRPr sz="1600"/>
+            </a:pPr>
+            <a:r>
+              <a:t>침대 시트 바람: UV 오프셋 애니메이션</a:t>
+            </a:r>
+          </a:p>
+          <a:p>
+            <a:pPr lvl="1">
+              <a:defRPr sz="1600"/>
+            </a:pPr>
+            <a:r>
+              <a:t>천장 선풍기 회전: 연속 회전 애니메이션</a:t>
+            </a:r>
+          </a:p>
+          <a:p>
+            <a:pPr lvl="1">
+              <a:defRPr sz="1600"/>
+            </a:pPr>
+            <a:r>
+              <a:t>문 개폐: 근접 시 부드러운 회전 (&lt; 3 units)</a:t>
+            </a:r>
+          </a:p>
+          <a:p>
+            <a:pPr lvl="1">
+              <a:defRPr sz="1600"/>
+            </a:pPr>
+            <a:r>
+              <a:t>먼지 파티클: 브라운 운동 시뮬레이션</a:t>
+            </a:r>
+          </a:p>
+          <a:p>
+            <a:pPr lvl="1">
+              <a:defRPr sz="1600"/>
+            </a:pPr>
+            <a:r>
+              <a:t>라디에이터 발열: 열 효과 애니메이션</a:t>
             </a:r>
           </a:p>
         </p:txBody>
@@ -3571,6 +3585,282 @@
           <a:lstStyle/>
           <a:p>
             <a:r>
+              <a:t>주요 기능 요약</a:t>
+            </a:r>
+          </a:p>
+        </p:txBody>
+      </p:sp>
+      <p:sp>
+        <p:nvSpPr>
+          <p:cNvPr id="3" name="Content Placeholder 2"/>
+          <p:cNvSpPr>
+            <a:spLocks noGrp="1"/>
+          </p:cNvSpPr>
+          <p:nvPr>
+            <p:ph idx="1"/>
+          </p:nvPr>
+        </p:nvSpPr>
+        <p:spPr/>
+        <p:txBody>
+          <a:bodyPr/>
+          <a:lstStyle/>
+          <a:p>
+            <a:r>
+              <a:t>인터랙션</a:t>
+            </a:r>
+          </a:p>
+          <a:p>
+            <a:pPr lvl="1"/>
+            <a:r>
+              <a:t>WASD로 아바타 이동 (카메라 상대 방향)</a:t>
+            </a:r>
+          </a:p>
+          <a:p>
+            <a:pPr lvl="1"/>
+            <a:r>
+              <a:t>마우스 드래그/휠로 카메라 조작</a:t>
+            </a:r>
+          </a:p>
+          <a:p>
+            <a:pPr lvl="1"/>
+            <a:r>
+              <a:t>자동 문 개폐 (근접 감지)</a:t>
+            </a:r>
+          </a:p>
+          <a:p>
+            <a:pPr lvl="1"/>
+            <a:r>
+              <a:t>전등 스위치 클릭 상호작용</a:t>
+            </a:r>
+          </a:p>
+          <a:p/>
+          <a:p>
+            <a:r>
+              <a:t>시각 효과</a:t>
+            </a:r>
+          </a:p>
+          <a:p>
+            <a:pPr lvl="1"/>
+            <a:r>
+              <a:t>PBR 재질과 텍스처 맵핑</a:t>
+            </a:r>
+          </a:p>
+          <a:p>
+            <a:pPr lvl="1"/>
+            <a:r>
+              <a:t>9개 광원 (포인트, 스팟, 디렉셔널)</a:t>
+            </a:r>
+          </a:p>
+          <a:p>
+            <a:pPr lvl="1"/>
+            <a:r>
+              <a:t>8개 실시간 애니메이션</a:t>
+            </a:r>
+          </a:p>
+          <a:p>
+            <a:pPr lvl="1"/>
+            <a:r>
+              <a:t>고품질 그림자 (4K 해상도)</a:t>
+            </a:r>
+          </a:p>
+          <a:p>
+            <a:pPr lvl="1"/>
+            <a:r>
+              <a:t>Bezier Curve 및 LatheGeometry 장식</a:t>
+            </a:r>
+          </a:p>
+          <a:p/>
+          <a:p>
+            <a:r>
+              <a:t>자산 관리</a:t>
+            </a:r>
+          </a:p>
+          <a:p>
+            <a:pPr lvl="1"/>
+            <a:r>
+              <a:t>GLB 3D 모델 로딩 (5개)</a:t>
+            </a:r>
+          </a:p>
+          <a:p>
+            <a:pPr lvl="1"/>
+            <a:r>
+              <a:t>PBR 텍스처 세트 (대리석, 리넨)</a:t>
+            </a:r>
+          </a:p>
+          <a:p>
+            <a:pPr lvl="1"/>
+            <a:r>
+              <a:t>에러 핸들링 및 타임아웃 처리</a:t>
+            </a:r>
+          </a:p>
+        </p:txBody>
+      </p:sp>
+    </p:spTree>
+  </p:cSld>
+  <p:clrMapOvr>
+    <a:masterClrMapping/>
+  </p:clrMapOvr>
+</p:sld>
+</file>
+
+<file path=ppt/slides/slide14.xml><?xml version="1.0" encoding="utf-8"?>
+<p:sld xmlns:a="http://schemas.openxmlformats.org/drawingml/2006/main" xmlns:p="http://schemas.openxmlformats.org/presentationml/2006/main" xmlns:r="http://schemas.openxmlformats.org/officeDocument/2006/relationships">
+  <p:cSld>
+    <p:spTree>
+      <p:nvGrpSpPr>
+        <p:cNvPr id="1" name=""/>
+        <p:cNvGrpSpPr/>
+        <p:nvPr/>
+      </p:nvGrpSpPr>
+      <p:grpSpPr/>
+      <p:sp>
+        <p:nvSpPr>
+          <p:cNvPr id="2" name="Title 1"/>
+          <p:cNvSpPr>
+            <a:spLocks noGrp="1"/>
+          </p:cNvSpPr>
+          <p:nvPr>
+            <p:ph type="title"/>
+          </p:nvPr>
+        </p:nvSpPr>
+        <p:spPr/>
+        <p:txBody>
+          <a:bodyPr/>
+          <a:lstStyle/>
+          <a:p>
+            <a:r>
+              <a:t>프로젝트 통계</a:t>
+            </a:r>
+          </a:p>
+        </p:txBody>
+      </p:sp>
+      <p:sp>
+        <p:nvSpPr>
+          <p:cNvPr id="3" name="Content Placeholder 2"/>
+          <p:cNvSpPr>
+            <a:spLocks noGrp="1"/>
+          </p:cNvSpPr>
+          <p:nvPr>
+            <p:ph idx="1"/>
+          </p:nvPr>
+        </p:nvSpPr>
+        <p:spPr/>
+        <p:txBody>
+          <a:bodyPr/>
+          <a:lstStyle/>
+          <a:p>
+            <a:r>
+              <a:t>코드 규모</a:t>
+            </a:r>
+          </a:p>
+          <a:p>
+            <a:pPr lvl="1"/>
+            <a:r>
+              <a:t>총 21개 JavaScript 파일</a:t>
+            </a:r>
+          </a:p>
+          <a:p>
+            <a:pPr lvl="1"/>
+            <a:r>
+              <a:t>약 2,000줄 이상의 코드</a:t>
+            </a:r>
+          </a:p>
+          <a:p>
+            <a:pPr lvl="1"/>
+            <a:r>
+              <a:t>프로젝트 크기: ~80MB</a:t>
+            </a:r>
+          </a:p>
+          <a:p/>
+          <a:p>
+            <a:r>
+              <a:t>3D 자산</a:t>
+            </a:r>
+          </a:p>
+          <a:p>
+            <a:pPr lvl="1"/>
+            <a:r>
+              <a:t>5개 GLB 3D 모델 (문, 창문, TV, 선풍기, 라디에이터)</a:t>
+            </a:r>
+          </a:p>
+          <a:p>
+            <a:pPr lvl="1"/>
+            <a:r>
+              <a:t>2개 PBR 텍스처 세트 (대리석, 리넨)</a:t>
+            </a:r>
+          </a:p>
+          <a:p>
+            <a:pPr lvl="1"/>
+            <a:r>
+              <a:t>총 30개 이상 씬 오브젝트</a:t>
+            </a:r>
+          </a:p>
+          <a:p/>
+          <a:p>
+            <a:r>
+              <a:t>모듈 구성</a:t>
+            </a:r>
+          </a:p>
+          <a:p>
+            <a:pPr lvl="1"/>
+            <a:r>
+              <a:t>Scene: 2개 (SceneManager, LightManager)</a:t>
+            </a:r>
+          </a:p>
+          <a:p>
+            <a:pPr lvl="1"/>
+            <a:r>
+              <a:t>Controls: 3개 (Avatar, Camera, Interaction)</a:t>
+            </a:r>
+          </a:p>
+          <a:p>
+            <a:pPr lvl="1"/>
+            <a:r>
+              <a:t>Objects: 12개 (Barracks, Avatar, 가구, Curve, Vase 등)</a:t>
+            </a:r>
+          </a:p>
+          <a:p>
+            <a:pPr lvl="1"/>
+            <a:r>
+              <a:t>Loaders: 2개 (Texture, Model)</a:t>
+            </a:r>
+          </a:p>
+        </p:txBody>
+      </p:sp>
+    </p:spTree>
+  </p:cSld>
+  <p:clrMapOvr>
+    <a:masterClrMapping/>
+  </p:clrMapOvr>
+</p:sld>
+</file>
+
+<file path=ppt/slides/slide15.xml><?xml version="1.0" encoding="utf-8"?>
+<p:sld xmlns:a="http://schemas.openxmlformats.org/drawingml/2006/main" xmlns:p="http://schemas.openxmlformats.org/presentationml/2006/main" xmlns:r="http://schemas.openxmlformats.org/officeDocument/2006/relationships">
+  <p:cSld>
+    <p:spTree>
+      <p:nvGrpSpPr>
+        <p:cNvPr id="1" name=""/>
+        <p:cNvGrpSpPr/>
+        <p:nvPr/>
+      </p:nvGrpSpPr>
+      <p:grpSpPr/>
+      <p:sp>
+        <p:nvSpPr>
+          <p:cNvPr id="2" name="Title 1"/>
+          <p:cNvSpPr>
+            <a:spLocks noGrp="1"/>
+          </p:cNvSpPr>
+          <p:nvPr>
+            <p:ph type="title"/>
+          </p:nvPr>
+        </p:nvSpPr>
+        <p:spPr/>
+        <p:txBody>
+          <a:bodyPr/>
+          <a:lstStyle/>
+          <a:p>
+            <a:r>
               <a:t>프로젝트 특징 및 성과</a:t>
             </a:r>
           </a:p>
@@ -3925,7 +4215,7 @@
           </a:p>
           <a:p>
             <a:pPr lvl="1">
-              <a:defRPr sz="1600"/>
+              <a:defRPr sz="1500"/>
             </a:pPr>
             <a:r>
               <a:t>main.js: 애플리케이션 부트스트랩 및 초기화</a:t>
@@ -3933,7 +4223,7 @@
           </a:p>
           <a:p>
             <a:pPr lvl="1">
-              <a:defRPr sz="1600"/>
+              <a:defRPr sz="1500"/>
             </a:pPr>
             <a:r>
               <a:t>scene/SceneManager.js: Three.js 씬, 카메라, 렌더러 설정</a:t>
@@ -3941,7 +4231,7 @@
           </a:p>
           <a:p>
             <a:pPr lvl="1">
-              <a:defRPr sz="1600"/>
+              <a:defRPr sz="1500"/>
             </a:pPr>
             <a:r>
               <a:t>scene/LightManager.js: 조명 시스템 관리</a:t>
@@ -3949,7 +4239,7 @@
           </a:p>
           <a:p>
             <a:pPr lvl="1">
-              <a:defRPr sz="1600"/>
+              <a:defRPr sz="1500"/>
             </a:pPr>
             <a:r>
               <a:t>objects/Barracks.js: 생활관 메인 오케스트레이터</a:t>
@@ -3957,7 +4247,7 @@
           </a:p>
           <a:p>
             <a:pPr lvl="1">
-              <a:defRPr sz="1600"/>
+              <a:defRPr sz="1500"/>
             </a:pPr>
             <a:r>
               <a:t>objects/Avatar.js: 플레이어 캐릭터</a:t>
@@ -3965,7 +4255,7 @@
           </a:p>
           <a:p>
             <a:pPr lvl="1">
-              <a:defRPr sz="1600"/>
+              <a:defRPr sz="1500"/>
             </a:pPr>
             <a:r>
               <a:t>controls/AvatarController.js: WASD 키보드 입력 처리</a:t>
@@ -3973,7 +4263,7 @@
           </a:p>
           <a:p>
             <a:pPr lvl="1">
-              <a:defRPr sz="1600"/>
+              <a:defRPr sz="1500"/>
             </a:pPr>
             <a:r>
               <a:t>controls/CameraController.js: 마우스 카메라 제어</a:t>
@@ -3981,7 +4271,15 @@
           </a:p>
           <a:p>
             <a:pPr lvl="1">
-              <a:defRPr sz="1600"/>
+              <a:defRPr sz="1500"/>
+            </a:pPr>
+            <a:r>
+              <a:t>controls/InteractionController.js: 객체 상호작용 관리</a:t>
+            </a:r>
+          </a:p>
+          <a:p>
+            <a:pPr lvl="1">
+              <a:defRPr sz="1500"/>
             </a:pPr>
             <a:r>
               <a:t>loaders/: 텍스처 및 3D 모델 로딩</a:t>
@@ -4009,100 +4307,63 @@
       <p:grpSpPr/>
       <p:sp>
         <p:nvSpPr>
-          <p:cNvPr id="2" name="Title 1"/>
-          <p:cNvSpPr>
-            <a:spLocks noGrp="1"/>
-          </p:cNvSpPr>
-          <p:nvPr>
-            <p:ph type="title"/>
-          </p:nvPr>
-        </p:nvSpPr>
-        <p:spPr/>
-        <p:txBody>
-          <a:bodyPr/>
-          <a:lstStyle/>
-          <a:p>
-            <a:r>
-              <a:t>Scene Management</a:t>
-            </a:r>
-          </a:p>
-        </p:txBody>
-      </p:sp>
-      <p:sp>
-        <p:nvSpPr>
-          <p:cNvPr id="3" name="Content Placeholder 2"/>
-          <p:cNvSpPr>
-            <a:spLocks noGrp="1"/>
-          </p:cNvSpPr>
-          <p:nvPr>
-            <p:ph idx="1"/>
-          </p:nvPr>
-        </p:nvSpPr>
-        <p:spPr/>
-        <p:txBody>
-          <a:bodyPr/>
-          <a:lstStyle/>
-          <a:p>
-            <a:r>
-              <a:t>SceneManager (scene/SceneManager.js)</a:t>
-            </a:r>
-          </a:p>
-          <a:p>
-            <a:pPr lvl="1"/>
-            <a:r>
-              <a:t>Three.js Scene 초기화 및 설정</a:t>
-            </a:r>
-          </a:p>
-          <a:p>
-            <a:pPr lvl="1"/>
-            <a:r>
-              <a:t>PerspectiveCamera 구성 (FOV: 75°)</a:t>
-            </a:r>
-          </a:p>
-          <a:p>
-            <a:pPr lvl="1"/>
-            <a:r>
-              <a:t>WebGL Renderer 설정 (안티앨리어싱, 그림자)</a:t>
-            </a:r>
-          </a:p>
-          <a:p>
-            <a:pPr lvl="1"/>
-            <a:r>
-              <a:t>반응형 윈도우 리사이즈 처리</a:t>
-            </a:r>
-          </a:p>
-          <a:p/>
-          <a:p>
-            <a:r>
-              <a:t>LightManager (scene/LightManager.js)</a:t>
-            </a:r>
-          </a:p>
-          <a:p>
-            <a:pPr lvl="1"/>
-            <a:r>
-              <a:t>Ambient Light - 부드러운 간접 조명</a:t>
-            </a:r>
-          </a:p>
-          <a:p>
-            <a:pPr lvl="1"/>
-            <a:r>
-              <a:t>Directional Light - 태양광 (창문을 통한 빛)</a:t>
-            </a:r>
-          </a:p>
-          <a:p>
-            <a:pPr lvl="1"/>
-            <a:r>
-              <a:t>Point Lights - 천장 조명 4개</a:t>
-            </a:r>
-          </a:p>
-          <a:p>
-            <a:pPr lvl="1"/>
-            <a:r>
-              <a:t>Spotlights - 창문 효과 4개</a:t>
-            </a:r>
-          </a:p>
-        </p:txBody>
-      </p:sp>
+          <p:cNvPr id="2" name="TextBox 1"/>
+          <p:cNvSpPr txBox="1"/>
+          <p:nvPr/>
+        </p:nvSpPr>
+        <p:spPr>
+          <a:xfrm>
+            <a:off x="457200" y="274320"/>
+            <a:ext cx="8229600" cy="548640"/>
+          </a:xfrm>
+          <a:prstGeom prst="rect">
+            <a:avLst/>
+          </a:prstGeom>
+          <a:noFill/>
+        </p:spPr>
+        <p:txBody>
+          <a:bodyPr wrap="none">
+            <a:spAutoFit/>
+          </a:bodyPr>
+          <a:lstStyle/>
+          <a:p>
+            <a:pPr algn="ctr">
+              <a:defRPr sz="3200" b="1">
+                <a:solidFill>
+                  <a:srgbClr val="1F497D"/>
+                </a:solidFill>
+              </a:defRPr>
+            </a:pPr>
+            <a:r>
+              <a:t>Scene Graph 구조</a:t>
+            </a:r>
+          </a:p>
+        </p:txBody>
+      </p:sp>
+      <p:pic>
+        <p:nvPicPr>
+          <p:cNvPr id="3" name="Picture 2" descr="image.png"/>
+          <p:cNvPicPr>
+            <a:picLocks noChangeAspect="1"/>
+          </p:cNvPicPr>
+          <p:nvPr/>
+        </p:nvPicPr>
+        <p:blipFill>
+          <a:blip r:embed="rId2"/>
+          <a:stretch>
+            <a:fillRect/>
+          </a:stretch>
+        </p:blipFill>
+        <p:spPr>
+          <a:xfrm>
+            <a:off x="457200" y="914400"/>
+            <a:ext cx="8229600" cy="5865317"/>
+          </a:xfrm>
+          <a:prstGeom prst="rect">
+            <a:avLst/>
+          </a:prstGeom>
+        </p:spPr>
+      </p:pic>
     </p:spTree>
   </p:cSld>
   <p:clrMapOvr>
@@ -4137,7 +4398,7 @@
           <a:lstStyle/>
           <a:p>
             <a:r>
-              <a:t>객체 시스템: 생활관 구조</a:t>
+              <a:t>Scene Management</a:t>
             </a:r>
           </a:p>
         </p:txBody>
@@ -4158,36 +4419,61 @@
           <a:lstStyle/>
           <a:p>
             <a:r>
-              <a:t>Barracks.js - 메인 오케스트레이터</a:t>
-            </a:r>
-          </a:p>
-          <a:p>
-            <a:r>
-              <a:t>방 구조</a:t>
-            </a:r>
-          </a:p>
-          <a:p>
-            <a:pPr lvl="1"/>
-            <a:r>
-              <a:t>바닥: 대리석 텍스처 (PBR 맵핑)</a:t>
-            </a:r>
-          </a:p>
-          <a:p>
-            <a:pPr lvl="1"/>
-            <a:r>
-              <a:t>벽 4개: 뒷벽에 문 구멍 (3m x 5m)</a:t>
-            </a:r>
-          </a:p>
-          <a:p>
-            <a:pPr lvl="1"/>
-            <a:r>
-              <a:t>천장: 절차적 캔버스 텍스처</a:t>
-            </a:r>
-          </a:p>
-          <a:p>
-            <a:pPr lvl="1"/>
-            <a:r>
-              <a:t>먼지 파티클 시스템 (200개)</a:t>
+              <a:t>SceneManager (scene/SceneManager.js)</a:t>
+            </a:r>
+          </a:p>
+          <a:p>
+            <a:pPr lvl="1"/>
+            <a:r>
+              <a:t>Three.js Scene 초기화 및 설정</a:t>
+            </a:r>
+          </a:p>
+          <a:p>
+            <a:pPr lvl="1"/>
+            <a:r>
+              <a:t>PerspectiveCamera 구성 (FOV: 75°)</a:t>
+            </a:r>
+          </a:p>
+          <a:p>
+            <a:pPr lvl="1"/>
+            <a:r>
+              <a:t>WebGL Renderer 설정 (안티앨리어싱, 그림자)</a:t>
+            </a:r>
+          </a:p>
+          <a:p>
+            <a:pPr lvl="1"/>
+            <a:r>
+              <a:t>반응형 윈도우 리사이즈 처리</a:t>
+            </a:r>
+          </a:p>
+          <a:p/>
+          <a:p>
+            <a:r>
+              <a:t>LightManager (scene/LightManager.js)</a:t>
+            </a:r>
+          </a:p>
+          <a:p>
+            <a:pPr lvl="1"/>
+            <a:r>
+              <a:t>Ambient Light - 부드러운 간접 조명</a:t>
+            </a:r>
+          </a:p>
+          <a:p>
+            <a:pPr lvl="1"/>
+            <a:r>
+              <a:t>Directional Light - 태양광 (창문을 통한 빛)</a:t>
+            </a:r>
+          </a:p>
+          <a:p>
+            <a:pPr lvl="1"/>
+            <a:r>
+              <a:t>Point Lights - 천장 조명 4개</a:t>
+            </a:r>
+          </a:p>
+          <a:p>
+            <a:pPr lvl="1"/>
+            <a:r>
+              <a:t>Spotlights - 창문 효과 4개</a:t>
             </a:r>
           </a:p>
         </p:txBody>
@@ -4226,7 +4512,7 @@
           <a:lstStyle/>
           <a:p>
             <a:r>
-              <a:t>객체 시스템: 가구 및 오브젝트</a:t>
+              <a:t>객체 시스템: 생활관 구조</a:t>
             </a:r>
           </a:p>
         </p:txBody>
@@ -4247,71 +4533,36 @@
           <a:lstStyle/>
           <a:p>
             <a:r>
-              <a:t>주요 가구 (총 23개 오브젝트)</a:t>
-            </a:r>
-          </a:p>
-          <a:p>
-            <a:pPr lvl="1">
-              <a:defRPr sz="1500"/>
-            </a:pPr>
-            <a:r>
-              <a:t>이층 침대 (BunkBed.js): 6개 - 침대 시트 바람 애니메이션</a:t>
-            </a:r>
-          </a:p>
-          <a:p>
-            <a:pPr lvl="1">
-              <a:defRPr sz="1500"/>
-            </a:pPr>
-            <a:r>
-              <a:t>서랍장 (Chester.js): 8개 - 각 침대 옆, 서랍 애니메이션</a:t>
-            </a:r>
-          </a:p>
-          <a:p>
-            <a:pPr lvl="1">
-              <a:defRPr sz="1500"/>
-            </a:pPr>
-            <a:r>
-              <a:t>사물함 (Locker.js): 1개 - 개인 물품 보관</a:t>
-            </a:r>
-          </a:p>
-          <a:p>
-            <a:pPr lvl="1">
-              <a:defRPr sz="1500"/>
-            </a:pPr>
-            <a:r>
-              <a:t>창문 (Window.js): 4개 - 주/야간 색상 애니메이션</a:t>
-            </a:r>
-          </a:p>
-          <a:p>
-            <a:pPr lvl="1">
-              <a:defRPr sz="1500"/>
-            </a:pPr>
-            <a:r>
-              <a:t>문 (Door.js): 1개 - 근접 시 자동 개폐</a:t>
-            </a:r>
-          </a:p>
-          <a:p>
-            <a:pPr lvl="1">
-              <a:defRPr sz="1500"/>
-            </a:pPr>
-            <a:r>
-              <a:t>TV (TV.js): 1개 - 화면 깜빡임 효과</a:t>
-            </a:r>
-          </a:p>
-          <a:p>
-            <a:pPr lvl="1">
-              <a:defRPr sz="1500"/>
-            </a:pPr>
-            <a:r>
-              <a:t>라디에이터 (Radiator.js): 2개 - 발열 효과</a:t>
-            </a:r>
-          </a:p>
-          <a:p>
-            <a:pPr lvl="1">
-              <a:defRPr sz="1500"/>
-            </a:pPr>
-            <a:r>
-              <a:t>천장 선풍기 (CeilingFan.js): 1개 - 회전 애니메이션</a:t>
+              <a:t>Barracks.js - 메인 오케스트레이터</a:t>
+            </a:r>
+          </a:p>
+          <a:p>
+            <a:r>
+              <a:t>방 구조</a:t>
+            </a:r>
+          </a:p>
+          <a:p>
+            <a:pPr lvl="1"/>
+            <a:r>
+              <a:t>바닥: 대리석 텍스처 (PBR 맵핑)</a:t>
+            </a:r>
+          </a:p>
+          <a:p>
+            <a:pPr lvl="1"/>
+            <a:r>
+              <a:t>벽 4개: 뒷벽에 문 구멍 (3m x 5m)</a:t>
+            </a:r>
+          </a:p>
+          <a:p>
+            <a:pPr lvl="1"/>
+            <a:r>
+              <a:t>천장: 절차적 캔버스 텍스처</a:t>
+            </a:r>
+          </a:p>
+          <a:p>
+            <a:pPr lvl="1"/>
+            <a:r>
+              <a:t>먼지 파티클 시스템 (200개)</a:t>
             </a:r>
           </a:p>
         </p:txBody>
@@ -4350,7 +4601,7 @@
           <a:lstStyle/>
           <a:p>
             <a:r>
-              <a:t>아바타 &amp; 컨트롤 시스템</a:t>
+              <a:t>객체 시스템: 가구 및 오브젝트</a:t>
             </a:r>
           </a:p>
         </p:txBody>
@@ -4371,73 +4622,95 @@
           <a:lstStyle/>
           <a:p>
             <a:r>
-              <a:t>Avatar (objects/Avatar.js)</a:t>
-            </a:r>
-          </a:p>
-          <a:p>
-            <a:pPr lvl="1"/>
-            <a:r>
-              <a:t>머리, 몸통, 팔, 다리로 구성된 심플한 캐릭터</a:t>
-            </a:r>
-          </a:p>
-          <a:p>
-            <a:pPr lvl="1"/>
-            <a:r>
-              <a:t>군복 색상 적용 (밀리터리 그린: #4A5D23)</a:t>
-            </a:r>
-          </a:p>
-          <a:p>
-            <a:pPr lvl="1"/>
-            <a:r>
-              <a:t>그림자 캐스팅 지원</a:t>
-            </a:r>
-          </a:p>
-          <a:p/>
-          <a:p>
-            <a:r>
-              <a:t>AvatarController (controls/AvatarController.js)</a:t>
-            </a:r>
-          </a:p>
-          <a:p>
-            <a:pPr lvl="1"/>
-            <a:r>
-              <a:t>WASD 키보드 입력으로 이동</a:t>
-            </a:r>
-          </a:p>
-          <a:p>
-            <a:pPr lvl="1"/>
-            <a:r>
-              <a:t>카메라 상대 방향 이동</a:t>
-            </a:r>
-          </a:p>
-          <a:p>
-            <a:pPr lvl="1"/>
-            <a:r>
-              <a:t>방 경계 충돌 감지 (±9, ±7 units)</a:t>
-            </a:r>
-          </a:p>
-          <a:p/>
-          <a:p>
-            <a:r>
-              <a:t>CameraController (controls/CameraController.js)</a:t>
-            </a:r>
-          </a:p>
-          <a:p>
-            <a:pPr lvl="1"/>
-            <a:r>
-              <a:t>마우스 드래그로 카메라 회전 (요/피치)</a:t>
-            </a:r>
-          </a:p>
-          <a:p>
-            <a:pPr lvl="1"/>
-            <a:r>
-              <a:t>마우스 휠로 줌 (3-15 units)</a:t>
-            </a:r>
-          </a:p>
-          <a:p>
-            <a:pPr lvl="1"/>
-            <a:r>
-              <a:t>3인칭 뷰로 아바타 추적</a:t>
+              <a:t>주요 가구 (총 30개 이상 오브젝트)</a:t>
+            </a:r>
+          </a:p>
+          <a:p>
+            <a:pPr lvl="1">
+              <a:defRPr sz="1400"/>
+            </a:pPr>
+            <a:r>
+              <a:t>이층 침대 (BunkBed.js): 6개 - 침대 시트 바람 애니메이션</a:t>
+            </a:r>
+          </a:p>
+          <a:p>
+            <a:pPr lvl="1">
+              <a:defRPr sz="1400"/>
+            </a:pPr>
+            <a:r>
+              <a:t>서랍장 (Chester.js): 8개 - 각 침대 옆, 서랍 애니메이션</a:t>
+            </a:r>
+          </a:p>
+          <a:p>
+            <a:pPr lvl="1">
+              <a:defRPr sz="1400"/>
+            </a:pPr>
+            <a:r>
+              <a:t>사물함 (Locker.js): 1개 - 개인 물품 보관</a:t>
+            </a:r>
+          </a:p>
+          <a:p>
+            <a:pPr lvl="1">
+              <a:defRPr sz="1400"/>
+            </a:pPr>
+            <a:r>
+              <a:t>창문 (Window.js): 4개 - 주/야간 색상 애니메이션</a:t>
+            </a:r>
+          </a:p>
+          <a:p>
+            <a:pPr lvl="1">
+              <a:defRPr sz="1400"/>
+            </a:pPr>
+            <a:r>
+              <a:t>문 (Door.js): 1개 - 근접 시 자동 개폐</a:t>
+            </a:r>
+          </a:p>
+          <a:p>
+            <a:pPr lvl="1">
+              <a:defRPr sz="1400"/>
+            </a:pPr>
+            <a:r>
+              <a:t>TV (TV.js): 1개 - 화면 깜빡임 효과</a:t>
+            </a:r>
+          </a:p>
+          <a:p>
+            <a:pPr lvl="1">
+              <a:defRPr sz="1400"/>
+            </a:pPr>
+            <a:r>
+              <a:t>라디에이터 (Radiator.js): 2개 - 발열 효과</a:t>
+            </a:r>
+          </a:p>
+          <a:p>
+            <a:pPr lvl="1">
+              <a:defRPr sz="1400"/>
+            </a:pPr>
+            <a:r>
+              <a:t>천장 선풍기 (CeilingFan.js): 1개 - 회전 애니메이션</a:t>
+            </a:r>
+          </a:p>
+          <a:p>
+            <a:pPr lvl="1">
+              <a:defRPr sz="1400"/>
+            </a:pPr>
+            <a:r>
+              <a:t>전등 스위치 (LightSwitch.js): 1개 - 클릭 상호작용</a:t>
+            </a:r>
+          </a:p>
+          <a:p>
+            <a:pPr lvl="1">
+              <a:defRPr sz="1400"/>
+            </a:pPr>
+            <a:r>
+              <a:t>장식 커브 (DecorativeCurve.js): 금색 Bezier 커브 장식</a:t>
+            </a:r>
+          </a:p>
+          <a:p>
+            <a:pPr lvl="1">
+              <a:defRPr sz="1400"/>
+            </a:pPr>
+            <a:r>
+              <a:t>화병 (Vase.js): 6개 - LatheGeometry 회전체</a:t>
             </a:r>
           </a:p>
         </p:txBody>
@@ -4476,7 +4749,7 @@
           <a:lstStyle/>
           <a:p>
             <a:r>
-              <a:t>렌더링 기술</a:t>
+              <a:t>고급 지오메트리: Curve &amp; Surface</a:t>
             </a:r>
           </a:p>
         </p:txBody>
@@ -4497,73 +4770,61 @@
           <a:lstStyle/>
           <a:p>
             <a:r>
-              <a:t>PBR (Physically Based Rendering)</a:t>
-            </a:r>
-          </a:p>
-          <a:p>
-            <a:pPr lvl="1"/>
-            <a:r>
-              <a:t>MeshStandardMaterial 사용</a:t>
-            </a:r>
-          </a:p>
-          <a:p>
-            <a:pPr lvl="1"/>
-            <a:r>
-              <a:t>Diffuse/Albedo 맵 - 기본 색상</a:t>
-            </a:r>
-          </a:p>
-          <a:p>
-            <a:pPr lvl="1"/>
-            <a:r>
-              <a:t>Normal 맵 - 표면 디테일</a:t>
-            </a:r>
-          </a:p>
-          <a:p>
-            <a:pPr lvl="1"/>
-            <a:r>
-              <a:t>Roughness 맵 - 거칠기</a:t>
-            </a:r>
-          </a:p>
-          <a:p>
-            <a:pPr lvl="1"/>
-            <a:r>
-              <a:t>Metalness 파라미터</a:t>
+              <a:t>DecorativeCurve - Bezier Curve (objects/DecorativeCurve.js)</a:t>
+            </a:r>
+          </a:p>
+          <a:p>
+            <a:pPr lvl="1"/>
+            <a:r>
+              <a:t>CubicBezierCurve3로 3D 곡선 생성</a:t>
+            </a:r>
+          </a:p>
+          <a:p>
+            <a:pPr lvl="1"/>
+            <a:r>
+              <a:t>TubeGeometry로 곡선을 따라 튜브 형성</a:t>
+            </a:r>
+          </a:p>
+          <a:p>
+            <a:pPr lvl="1"/>
+            <a:r>
+              <a:t>발광 효과가 있는 금색 장식 트림 (앞벽)</a:t>
+            </a:r>
+          </a:p>
+          <a:p>
+            <a:pPr lvl="1"/>
+            <a:r>
+              <a:t>4개 제어점으로 부드러운 곡선 표현</a:t>
             </a:r>
           </a:p>
           <a:p/>
           <a:p>
             <a:r>
-              <a:t>고급 렌더링 설정</a:t>
-            </a:r>
-          </a:p>
-          <a:p>
-            <a:pPr lvl="1"/>
-            <a:r>
-              <a:t>ACES Filmic Tone Mapping - 영화 같은 색감</a:t>
-            </a:r>
-          </a:p>
-          <a:p>
-            <a:pPr lvl="1"/>
-            <a:r>
-              <a:t>sRGB 색공간 인코딩</a:t>
-            </a:r>
-          </a:p>
-          <a:p>
-            <a:pPr lvl="1"/>
-            <a:r>
-              <a:t>PCF Soft Shadows - 부드러운 그림자</a:t>
-            </a:r>
-          </a:p>
-          <a:p>
-            <a:pPr lvl="1"/>
-            <a:r>
-              <a:t>4096x4096 그림자 맵 해상도</a:t>
-            </a:r>
-          </a:p>
-          <a:p>
-            <a:pPr lvl="1"/>
-            <a:r>
-              <a:t>안티앨리어싱 및 고해상도 픽셀 비율 지원</a:t>
+              <a:t>Vase - LatheGeometry (objects/Vase.js)</a:t>
+            </a:r>
+          </a:p>
+          <a:p>
+            <a:pPr lvl="1"/>
+            <a:r>
+              <a:t>LatheGeometry로 회전체 생성 (화병, 컵)</a:t>
+            </a:r>
+          </a:p>
+          <a:p>
+            <a:pPr lvl="1"/>
+            <a:r>
+              <a:t>2D 프로파일을 회전축 중심으로 회전시켜 3D 형상</a:t>
+            </a:r>
+          </a:p>
+          <a:p>
+            <a:pPr lvl="1"/>
+            <a:r>
+              <a:t>서랍장 위에 6개 배치 (다양한 크기)</a:t>
+            </a:r>
+          </a:p>
+          <a:p>
+            <a:pPr lvl="1"/>
+            <a:r>
+              <a:t>도자기 재질 시뮬레이션 (높은 roughness)</a:t>
             </a:r>
           </a:p>
         </p:txBody>
